--- a/examples/repositories/ppt-agent-showcase/deck.pptx
+++ b/examples/repositories/ppt-agent-showcase/deck.pptx
@@ -4353,7 +4353,7 @@
         </p:nvSpPr>
         <p:spPr>
           <a:xfrm>
-            <a:off x="704850" y="4171950"/>
+            <a:off x="1444823" y="4171950"/>
             <a:ext cx="386804" cy="500062"/>
           </a:xfrm>
           <a:prstGeom prst="rect">
@@ -4389,7 +4389,7 @@
         </p:nvSpPr>
         <p:spPr>
           <a:xfrm>
-            <a:off x="704850" y="4638675"/>
+            <a:off x="1299864" y="4638675"/>
             <a:ext cx="676721" cy="528637"/>
           </a:xfrm>
           <a:prstGeom prst="rect">
@@ -4425,7 +4425,7 @@
         </p:nvSpPr>
         <p:spPr>
           <a:xfrm>
-            <a:off x="704850" y="5248275"/>
+            <a:off x="1028997" y="5248275"/>
             <a:ext cx="1218455" cy="342900"/>
           </a:xfrm>
           <a:prstGeom prst="rect">
@@ -4461,7 +4461,7 @@
         </p:nvSpPr>
         <p:spPr>
           <a:xfrm>
-            <a:off x="3638550" y="4171950"/>
+            <a:off x="4378523" y="4171950"/>
             <a:ext cx="386804" cy="500062"/>
           </a:xfrm>
           <a:prstGeom prst="rect">
@@ -4497,7 +4497,7 @@
         </p:nvSpPr>
         <p:spPr>
           <a:xfrm>
-            <a:off x="3638550" y="4638675"/>
+            <a:off x="4233564" y="4638675"/>
             <a:ext cx="676721" cy="528637"/>
           </a:xfrm>
           <a:prstGeom prst="rect">
@@ -4533,7 +4533,7 @@
         </p:nvSpPr>
         <p:spPr>
           <a:xfrm>
-            <a:off x="3638550" y="5248275"/>
+            <a:off x="3914626" y="5248275"/>
             <a:ext cx="1314598" cy="342900"/>
           </a:xfrm>
           <a:prstGeom prst="rect">
@@ -4569,7 +4569,7 @@
         </p:nvSpPr>
         <p:spPr>
           <a:xfrm>
-            <a:off x="6572250" y="4171950"/>
+            <a:off x="7312223" y="4171950"/>
             <a:ext cx="386804" cy="500062"/>
           </a:xfrm>
           <a:prstGeom prst="rect">
@@ -4605,7 +4605,7 @@
         </p:nvSpPr>
         <p:spPr>
           <a:xfrm>
-            <a:off x="6572250" y="4638675"/>
+            <a:off x="7167264" y="4638675"/>
             <a:ext cx="676721" cy="528637"/>
           </a:xfrm>
           <a:prstGeom prst="rect">
@@ -4641,7 +4641,7 @@
         </p:nvSpPr>
         <p:spPr>
           <a:xfrm>
-            <a:off x="6572250" y="5248275"/>
+            <a:off x="6752332" y="5248275"/>
             <a:ext cx="1506587" cy="342900"/>
           </a:xfrm>
           <a:prstGeom prst="rect">
@@ -4677,7 +4677,7 @@
         </p:nvSpPr>
         <p:spPr>
           <a:xfrm>
-            <a:off x="9505950" y="4171950"/>
+            <a:off x="10198298" y="4171950"/>
             <a:ext cx="386804" cy="500062"/>
           </a:xfrm>
           <a:prstGeom prst="rect">
@@ -4713,7 +4713,7 @@
         </p:nvSpPr>
         <p:spPr>
           <a:xfrm>
-            <a:off x="9505950" y="4638675"/>
+            <a:off x="9715053" y="4638675"/>
             <a:ext cx="1353442" cy="528637"/>
           </a:xfrm>
           <a:prstGeom prst="rect">
@@ -4749,7 +4749,7 @@
         </p:nvSpPr>
         <p:spPr>
           <a:xfrm>
-            <a:off x="9505950" y="5248275"/>
+            <a:off x="9518451" y="5248275"/>
             <a:ext cx="1746646" cy="342900"/>
           </a:xfrm>
           <a:prstGeom prst="rect">
